--- a/Training Materials/14. ReactJS/Slides/6. Component Rendering and Side Effects/component-rendering-and-side-effects-slides.pptx
+++ b/Training Materials/14. ReactJS/Slides/6. Component Rendering and Side Effects/component-rendering-and-side-effects-slides.pptx
@@ -149,7 +149,7 @@
           <a:p>
             <a:fld id="{1D2B9CF1-28D6-473C-9F46-A0C998A8E34F}" type="datetimeFigureOut">
               <a:rPr lang="en-IN" smtClean="0"/>
-              <a:t>27-10-2024</a:t>
+              <a:t>18-09-2025</a:t>
             </a:fld>
             <a:endParaRPr lang="en-IN"/>
           </a:p>
@@ -626,7 +626,7 @@
           <a:p>
             <a:fld id="{239DC8B9-8391-4A01-9498-D2B87DFE2681}" type="datetime1">
               <a:rPr lang="en-US" smtClean="0"/>
-              <a:t>10/27/2024</a:t>
+              <a:t>9/18/2025</a:t>
             </a:fld>
             <a:endParaRPr lang="en-US"/>
           </a:p>
@@ -861,7 +861,7 @@
           <a:p>
             <a:fld id="{3403B619-6CAE-44B9-B9E9-874C2669E6F5}" type="datetime1">
               <a:rPr lang="en-US" smtClean="0"/>
-              <a:t>10/27/2024</a:t>
+              <a:t>9/18/2025</a:t>
             </a:fld>
             <a:endParaRPr lang="en-US"/>
           </a:p>
@@ -1125,7 +1125,7 @@
           <a:p>
             <a:fld id="{753BFD2E-4011-4FAF-ABC0-2B310E606F9C}" type="datetime1">
               <a:rPr lang="en-US" smtClean="0"/>
-              <a:t>10/27/2024</a:t>
+              <a:t>9/18/2025</a:t>
             </a:fld>
             <a:endParaRPr lang="en-US"/>
           </a:p>
@@ -1331,7 +1331,7 @@
           <a:p>
             <a:fld id="{E5C0E940-4748-41AD-9CD4-35D0880B7E42}" type="datetime1">
               <a:rPr lang="en-US" smtClean="0"/>
-              <a:t>10/27/2024</a:t>
+              <a:t>9/18/2025</a:t>
             </a:fld>
             <a:endParaRPr lang="en-US"/>
           </a:p>
@@ -1450,7 +1450,7 @@
           <a:p>
             <a:fld id="{E7D5BE62-D3B2-41C1-989B-A5BE45052A87}" type="datetime1">
               <a:rPr lang="en-US" smtClean="0"/>
-              <a:t>10/27/2024</a:t>
+              <a:t>9/18/2025</a:t>
             </a:fld>
             <a:endParaRPr lang="en-US"/>
           </a:p>
@@ -1675,7 +1675,7 @@
           <a:p>
             <a:fld id="{0DC8718D-C773-4A62-84EC-479FCB9EA576}" type="datetime1">
               <a:rPr lang="en-US" smtClean="0"/>
-              <a:t>10/27/2024</a:t>
+              <a:t>9/18/2025</a:t>
             </a:fld>
             <a:endParaRPr lang="en-US"/>
           </a:p>
@@ -2178,7 +2178,7 @@
                 <a:spcPct val="100000"/>
               </a:lnSpc>
             </a:pPr>
-            <a:endParaRPr sz="2700">
+            <a:endParaRPr sz="2700" dirty="0">
               <a:latin typeface="Times New Roman"/>
               <a:cs typeface="Times New Roman"/>
             </a:endParaRPr>
@@ -2192,7 +2192,7 @@
                 <a:spcPts val="465"/>
               </a:spcBef>
             </a:pPr>
-            <a:endParaRPr sz="2700">
+            <a:endParaRPr sz="2700" dirty="0">
               <a:latin typeface="Times New Roman"/>
               <a:cs typeface="Times New Roman"/>
             </a:endParaRPr>
@@ -2213,7 +2213,7 @@
               </a:rPr>
               <a:t>App</a:t>
             </a:r>
-            <a:endParaRPr sz="2700">
+            <a:endParaRPr sz="2700" dirty="0">
               <a:latin typeface="Arial Black"/>
               <a:cs typeface="Arial Black"/>
             </a:endParaRPr>
@@ -2377,7 +2377,7 @@
                 <a:spcPct val="100000"/>
               </a:lnSpc>
             </a:pPr>
-            <a:endParaRPr sz="2700">
+            <a:endParaRPr sz="2700" dirty="0">
               <a:latin typeface="Times New Roman"/>
               <a:cs typeface="Times New Roman"/>
             </a:endParaRPr>
@@ -2391,7 +2391,7 @@
                 <a:spcPts val="459"/>
               </a:spcBef>
             </a:pPr>
-            <a:endParaRPr sz="2700">
+            <a:endParaRPr sz="2700" dirty="0">
               <a:latin typeface="Times New Roman"/>
               <a:cs typeface="Times New Roman"/>
             </a:endParaRPr>
@@ -2412,7 +2412,7 @@
               </a:rPr>
               <a:t>HouseRow</a:t>
             </a:r>
-            <a:endParaRPr sz="2700">
+            <a:endParaRPr sz="2700" dirty="0">
               <a:latin typeface="Arial Black"/>
               <a:cs typeface="Arial Black"/>
             </a:endParaRPr>
@@ -4820,7 +4820,7 @@
         <p:spPr>
           <a:xfrm>
             <a:off x="4089398" y="4086859"/>
-            <a:ext cx="10109200" cy="2046605"/>
+            <a:ext cx="10109200" cy="965201"/>
           </a:xfrm>
           <a:prstGeom prst="rect">
             <a:avLst/>
@@ -4841,58 +4841,12 @@
               </a:spcBef>
             </a:pPr>
             <a:r>
-              <a:rPr sz="6600" spc="70" dirty="0"/>
-              <a:t>htt</a:t>
-            </a:r>
-            <a:r>
-              <a:rPr sz="6600" spc="65" dirty="0"/>
-              <a:t>p</a:t>
-            </a:r>
-            <a:r>
-              <a:rPr sz="6600" spc="70" dirty="0"/>
-              <a:t>s</a:t>
-            </a:r>
-            <a:r>
-              <a:rPr sz="6600" spc="75" dirty="0"/>
-              <a:t>:</a:t>
-            </a:r>
-            <a:r>
-              <a:rPr sz="6600" spc="-665" dirty="0"/>
-              <a:t>/</a:t>
-            </a:r>
-            <a:r>
-              <a:rPr sz="6600" spc="70" dirty="0"/>
-              <a:t>/reactjs</a:t>
-            </a:r>
-            <a:r>
-              <a:rPr sz="6600" spc="75" dirty="0"/>
-              <a:t>.</a:t>
-            </a:r>
-            <a:r>
-              <a:rPr sz="6600" spc="70" dirty="0"/>
-              <a:t>org/</a:t>
-            </a:r>
-            <a:r>
-              <a:rPr sz="6600" spc="65" dirty="0"/>
-              <a:t>d</a:t>
-            </a:r>
-            <a:r>
-              <a:rPr sz="6600" spc="70" dirty="0"/>
-              <a:t>ocs/</a:t>
-            </a:r>
-            <a:r>
-              <a:rPr sz="6600" spc="40" dirty="0"/>
-              <a:t> </a:t>
-            </a:r>
-            <a:r>
-              <a:rPr sz="6600" spc="160" dirty="0"/>
-              <a:t>react-</a:t>
-            </a:r>
-            <a:r>
-              <a:rPr sz="6600" spc="55" dirty="0"/>
-              <a:t>api.html#reactmemo</a:t>
-            </a:r>
-            <a:endParaRPr sz="6600"/>
+              <a:rPr lang="en-IN" sz="6600" dirty="0">
+                <a:hlinkClick r:id="rId2"/>
+              </a:rPr>
+              <a:t>memo – React</a:t>
+            </a:r>
+            <a:endParaRPr sz="6600" dirty="0"/>
           </a:p>
         </p:txBody>
       </p:sp>
